--- a/Report DATN CH.HTTT/PPT_TST_GATHDA-DVCL.pptx
+++ b/Report DATN CH.HTTT/PPT_TST_GATHDA-DVCL.pptx
@@ -39,27 +39,30 @@
     <p:embeddedFont>
       <p:font typeface="等线" panose="02010600030101010101" pitchFamily="2" charset="-122"/>
       <p:regular r:id="rId27"/>
-      <p:bold r:id="rId28"/>
     </p:embeddedFont>
     <p:embeddedFont>
       <p:font typeface="微软雅黑" panose="020B0503020204020204" pitchFamily="34" charset="-122"/>
-      <p:regular r:id="rId29"/>
+      <p:regular r:id="rId28"/>
+      <p:bold r:id="rId29"/>
+    </p:embeddedFont>
+    <p:embeddedFont>
+      <p:font typeface="#9Slide03 SVNNeutraface 2" panose="02000600040000020004" pitchFamily="2" charset="0"/>
       <p:bold r:id="rId30"/>
     </p:embeddedFont>
     <p:embeddedFont>
-      <p:font typeface="#9Slide03 SVNNeutraface 2" panose="02000600040000020004" pitchFamily="2" charset="0"/>
-      <p:bold r:id="rId31"/>
+      <p:font typeface="Cambria Math" panose="02040503050406030204" pitchFamily="18" charset="0"/>
+      <p:regular r:id="rId31"/>
     </p:embeddedFont>
     <p:embeddedFont>
-      <p:font typeface="Anton" pitchFamily="2" charset="0"/>
+      <p:font typeface="Codec Pro" panose="020B0604020202020204" charset="0"/>
       <p:regular r:id="rId32"/>
     </p:embeddedFont>
     <p:embeddedFont>
-      <p:font typeface="Codec Pro" panose="020B0604020202020204" charset="0"/>
+      <p:font typeface="Codec Pro Bold" panose="020B0604020202020204" charset="0"/>
       <p:regular r:id="rId33"/>
     </p:embeddedFont>
     <p:embeddedFont>
-      <p:font typeface="Codec Pro Bold" panose="020B0604020202020204" charset="0"/>
+      <p:font typeface="UTM Androgyne" panose="02040603050506020204" pitchFamily="18" charset="0"/>
       <p:regular r:id="rId34"/>
     </p:embeddedFont>
   </p:embeddedFontLst>
@@ -251,7 +254,7 @@
           <a:p>
             <a:fld id="{D9A8CD44-19F2-4319-AE0B-2DCC42EEAF6F}" type="datetimeFigureOut">
               <a:rPr lang="zh-CN" altLang="en-US" smtClean="0"/>
-              <a:t>2026/5/31</a:t>
+              <a:t>2026/6/1</a:t>
             </a:fld>
             <a:endParaRPr lang="zh-CN" altLang="en-US"/>
           </a:p>
@@ -780,7 +783,7 @@
             </a:r>
             <a:r>
               <a:rPr lang="en-US" altLang="zh-CN"/>
-              <a:t> CNTT2-k15, </a:t>
+              <a:t> HTTT 14.2, </a:t>
             </a:r>
             <a:r>
               <a:rPr lang="en-US" altLang="zh-CN" err="1"/>
@@ -836,23 +839,7 @@
             </a:r>
             <a:r>
               <a:rPr lang="en-US" altLang="zh-CN"/>
-              <a:t> </a:t>
-            </a:r>
-            <a:r>
-              <a:rPr lang="en-US" altLang="zh-CN" err="1"/>
-              <a:t>Chiến</a:t>
-            </a:r>
-            <a:r>
-              <a:rPr lang="en-US" altLang="zh-CN"/>
-              <a:t> </a:t>
-            </a:r>
-            <a:r>
-              <a:rPr lang="en-US" altLang="zh-CN" err="1"/>
-              <a:t>Thắng</a:t>
-            </a:r>
-            <a:r>
-              <a:rPr lang="en-US" altLang="zh-CN"/>
-              <a:t> </a:t>
+              <a:t> Văn Tỉnh </a:t>
             </a:r>
             <a:r>
               <a:rPr lang="en-US" altLang="zh-CN" err="1"/>
@@ -2554,8 +2541,8 @@
         </p:nvSpPr>
         <p:spPr/>
       </p:sp>
-      <mc:AlternateContent xmlns:mc="http://schemas.openxmlformats.org/markup-compatibility/2006">
-        <mc:Choice xmlns:a14="http://schemas.microsoft.com/office/drawing/2010/main" Requires="a14">
+      <mc:AlternateContent xmlns:mc="http://schemas.openxmlformats.org/markup-compatibility/2006" xmlns:a14="http://schemas.microsoft.com/office/drawing/2010/main">
+        <mc:Choice Requires="a14">
           <p:sp>
             <p:nvSpPr>
               <p:cNvPr id="3" name="备注占位符 2">
@@ -2614,7 +2601,7 @@
                           <a:schemeClr val="tx1"/>
                         </a:solidFill>
                         <a:effectLst/>
-                        <a:latin typeface="+mn-lt"/>
+                        <a:latin typeface="Cambria Math" panose="02040503050406030204" pitchFamily="18" charset="0"/>
                         <a:ea typeface="+mn-ea"/>
                         <a:cs typeface="+mn-cs"/>
                       </a:rPr>
@@ -2626,7 +2613,7 @@
                           <a:schemeClr val="tx1"/>
                         </a:solidFill>
                         <a:effectLst/>
-                        <a:latin typeface="+mn-lt"/>
+                        <a:latin typeface="Cambria Math" panose="02040503050406030204" pitchFamily="18" charset="0"/>
                         <a:ea typeface="+mn-ea"/>
                         <a:cs typeface="+mn-cs"/>
                       </a:rPr>
@@ -2656,7 +2643,7 @@
                               <a:schemeClr val="tx1"/>
                             </a:solidFill>
                             <a:effectLst/>
-                            <a:latin typeface="+mn-lt"/>
+                            <a:latin typeface="Cambria Math" panose="02040503050406030204" pitchFamily="18" charset="0"/>
                             <a:ea typeface="+mn-ea"/>
                             <a:cs typeface="+mn-cs"/>
                           </a:rPr>
@@ -2669,7 +2656,7 @@
                               <a:schemeClr val="tx1"/>
                             </a:solidFill>
                             <a:effectLst/>
-                            <a:latin typeface="+mn-lt"/>
+                            <a:latin typeface="Cambria Math" panose="02040503050406030204" pitchFamily="18" charset="0"/>
                             <a:ea typeface="+mn-ea"/>
                             <a:cs typeface="+mn-cs"/>
                           </a:rPr>
@@ -2683,7 +2670,7 @@
                               <a:schemeClr val="tx1"/>
                             </a:solidFill>
                             <a:effectLst/>
-                            <a:latin typeface="+mn-lt"/>
+                            <a:latin typeface="Cambria Math" panose="02040503050406030204" pitchFamily="18" charset="0"/>
                             <a:ea typeface="+mn-ea"/>
                             <a:cs typeface="+mn-cs"/>
                           </a:rPr>
@@ -2697,7 +2684,7 @@
                           <a:schemeClr val="tx1"/>
                         </a:solidFill>
                         <a:effectLst/>
-                        <a:latin typeface="+mn-lt"/>
+                        <a:latin typeface="Cambria Math" panose="02040503050406030204" pitchFamily="18" charset="0"/>
                         <a:ea typeface="+mn-ea"/>
                         <a:cs typeface="+mn-cs"/>
                       </a:rPr>
@@ -2709,7 +2696,7 @@
                           <a:schemeClr val="tx1"/>
                         </a:solidFill>
                         <a:effectLst/>
-                        <a:latin typeface="+mn-lt"/>
+                        <a:latin typeface="Cambria Math" panose="02040503050406030204" pitchFamily="18" charset="0"/>
                         <a:ea typeface="+mn-ea"/>
                         <a:cs typeface="+mn-cs"/>
                       </a:rPr>
@@ -2736,7 +2723,7 @@
             </p:txBody>
           </p:sp>
         </mc:Choice>
-        <mc:Fallback>
+        <mc:Fallback xmlns="">
           <p:sp>
             <p:nvSpPr>
               <p:cNvPr id="3" name="备注占位符 2">
@@ -6745,8 +6732,8 @@
         </p:nvSpPr>
         <p:spPr>
           <a:xfrm>
-            <a:off x="7450221" y="5069317"/>
-            <a:ext cx="3557384" cy="369332"/>
+            <a:off x="6888369" y="5773508"/>
+            <a:ext cx="4681090" cy="461665"/>
           </a:xfrm>
           <a:prstGeom prst="rect">
             <a:avLst/>
@@ -6761,7 +6748,7 @@
           <a:p>
             <a:pPr algn="ctr"/>
             <a:r>
-              <a:rPr lang="en-US" i="1">
+              <a:rPr lang="en-US" sz="2400" i="1">
                 <a:solidFill>
                   <a:srgbClr val="002060"/>
                 </a:solidFill>
@@ -6770,7 +6757,7 @@
               </a:rPr>
               <a:t>Hà Nội, ngày 01 tháng 06 năm 2026</a:t>
             </a:r>
-            <a:endParaRPr lang="en-US"/>
+            <a:endParaRPr lang="en-US" sz="2400"/>
           </a:p>
         </p:txBody>
       </p:sp>
@@ -7971,13 +7958,13 @@
   <p:clrMapOvr>
     <a:masterClrMapping/>
   </p:clrMapOvr>
-  <mc:AlternateContent xmlns:mc="http://schemas.openxmlformats.org/markup-compatibility/2006">
-    <mc:Choice xmlns:p159="http://schemas.microsoft.com/office/powerpoint/2015/09/main" Requires="p159">
+  <mc:AlternateContent xmlns:mc="http://schemas.openxmlformats.org/markup-compatibility/2006" xmlns:p159="http://schemas.microsoft.com/office/powerpoint/2015/09/main">
+    <mc:Choice Requires="p159">
       <p:transition spd="slow">
         <p159:morph option="byObject"/>
       </p:transition>
     </mc:Choice>
-    <mc:Fallback>
+    <mc:Fallback xmlns="">
       <p:transition spd="slow">
         <p:fade/>
       </p:transition>
@@ -8364,8 +8351,8 @@
           </a:p>
         </p:txBody>
       </p:sp>
-      <mc:AlternateContent xmlns:mc="http://schemas.openxmlformats.org/markup-compatibility/2006">
-        <mc:Choice xmlns:a14="http://schemas.microsoft.com/office/drawing/2010/main" Requires="a14">
+      <mc:AlternateContent xmlns:mc="http://schemas.openxmlformats.org/markup-compatibility/2006" xmlns:a14="http://schemas.microsoft.com/office/drawing/2010/main">
+        <mc:Choice Requires="a14">
           <p:sp>
             <p:nvSpPr>
               <p:cNvPr id="5" name="Rectangle 4">
@@ -8440,11 +8427,15 @@
                 <a14:m>
                   <m:oMath xmlns:m="http://schemas.openxmlformats.org/officeDocument/2006/math">
                     <m:r>
-                      <a:rPr lang="en-US" sz="2000" b="1" i="1"/>
+                      <a:rPr lang="en-US" sz="2000" b="1" i="1">
+                        <a:latin typeface="Cambria Math" panose="02040503050406030204" pitchFamily="18" charset="0"/>
+                      </a:rPr>
                       <m:t>𝑹</m:t>
                     </m:r>
                     <m:r>
-                      <a:rPr lang="en-US" sz="2000" i="1"/>
+                      <a:rPr lang="en-US" sz="2000" i="1">
+                        <a:latin typeface="Cambria Math" panose="02040503050406030204" pitchFamily="18" charset="0"/>
+                      </a:rPr>
                       <m:t> </m:t>
                     </m:r>
                   </m:oMath>
@@ -8540,7 +8531,7 @@
             </p:txBody>
           </p:sp>
         </mc:Choice>
-        <mc:Fallback>
+        <mc:Fallback xmlns="">
           <p:sp>
             <p:nvSpPr>
               <p:cNvPr id="5" name="Rectangle 4">
@@ -8910,13 +8901,13 @@
   <p:clrMapOvr>
     <a:masterClrMapping/>
   </p:clrMapOvr>
-  <mc:AlternateContent xmlns:mc="http://schemas.openxmlformats.org/markup-compatibility/2006">
-    <mc:Choice xmlns:p159="http://schemas.microsoft.com/office/powerpoint/2015/09/main" Requires="p159">
+  <mc:AlternateContent xmlns:mc="http://schemas.openxmlformats.org/markup-compatibility/2006" xmlns:p159="http://schemas.microsoft.com/office/powerpoint/2015/09/main">
+    <mc:Choice Requires="p159">
       <p:transition spd="slow">
         <p159:morph option="byObject"/>
       </p:transition>
     </mc:Choice>
-    <mc:Fallback>
+    <mc:Fallback xmlns="">
       <p:transition spd="slow">
         <p:fade/>
       </p:transition>
@@ -9552,13 +9543,13 @@
   <p:clrMapOvr>
     <a:masterClrMapping/>
   </p:clrMapOvr>
-  <mc:AlternateContent xmlns:mc="http://schemas.openxmlformats.org/markup-compatibility/2006">
-    <mc:Choice xmlns:p159="http://schemas.microsoft.com/office/powerpoint/2015/09/main" Requires="p159">
+  <mc:AlternateContent xmlns:mc="http://schemas.openxmlformats.org/markup-compatibility/2006" xmlns:p159="http://schemas.microsoft.com/office/powerpoint/2015/09/main">
+    <mc:Choice Requires="p159">
       <p:transition spd="slow">
         <p159:morph option="byObject"/>
       </p:transition>
     </mc:Choice>
-    <mc:Fallback>
+    <mc:Fallback xmlns="">
       <p:transition spd="slow">
         <p:fade/>
       </p:transition>
@@ -10624,13 +10615,13 @@
   <p:clrMapOvr>
     <a:masterClrMapping/>
   </p:clrMapOvr>
-  <mc:AlternateContent xmlns:mc="http://schemas.openxmlformats.org/markup-compatibility/2006">
-    <mc:Choice xmlns:p159="http://schemas.microsoft.com/office/powerpoint/2015/09/main" Requires="p159">
+  <mc:AlternateContent xmlns:mc="http://schemas.openxmlformats.org/markup-compatibility/2006" xmlns:p159="http://schemas.microsoft.com/office/powerpoint/2015/09/main">
+    <mc:Choice Requires="p159">
       <p:transition spd="slow">
         <p159:morph option="byObject"/>
       </p:transition>
     </mc:Choice>
-    <mc:Fallback>
+    <mc:Fallback xmlns="">
       <p:transition spd="slow">
         <p:fade/>
       </p:transition>
@@ -11031,8 +11022,8 @@
         </p:nvSpPr>
         <p:spPr>
           <a:xfrm>
-            <a:off x="1635694" y="2032606"/>
-            <a:ext cx="4198161" cy="1883657"/>
+            <a:off x="1092544" y="2032606"/>
+            <a:ext cx="4741312" cy="2241960"/>
           </a:xfrm>
           <a:prstGeom prst="rect">
             <a:avLst/>
@@ -11053,7 +11044,7 @@
               <a:buChar char="q"/>
             </a:pPr>
             <a:r>
-              <a:rPr lang="en-US" sz="2000" b="1">
+              <a:rPr lang="en-US" sz="2400" b="1">
                 <a:latin typeface="Times New Roman" panose="02020603050405020304" pitchFamily="18" charset="0"/>
                 <a:cs typeface="Times New Roman" panose="02020603050405020304" pitchFamily="18" charset="0"/>
               </a:rPr>
@@ -11069,13 +11060,13 @@
               <a:buChar char="Ø"/>
             </a:pPr>
             <a:r>
-              <a:rPr lang="vi-VN" sz="2000">
+              <a:rPr lang="vi-VN" sz="2400">
                 <a:latin typeface="Times New Roman" panose="02020603050405020304" pitchFamily="18" charset="0"/>
                 <a:cs typeface="Times New Roman" panose="02020603050405020304" pitchFamily="18" charset="0"/>
               </a:rPr>
               <a:t>Ma trận tương tác đã biết</a:t>
             </a:r>
-            <a:endParaRPr lang="en-US" sz="2000">
+            <a:endParaRPr lang="en-US" sz="2400">
               <a:latin typeface="Times New Roman" panose="02020603050405020304" pitchFamily="18" charset="0"/>
               <a:cs typeface="Times New Roman" panose="02020603050405020304" pitchFamily="18" charset="0"/>
             </a:endParaRPr>
@@ -11089,13 +11080,13 @@
               <a:buChar char="Ø"/>
             </a:pPr>
             <a:r>
-              <a:rPr lang="vi-VN" sz="2000">
+              <a:rPr lang="vi-VN" sz="2400">
                 <a:latin typeface="Times New Roman" panose="02020603050405020304" pitchFamily="18" charset="0"/>
                 <a:cs typeface="Times New Roman" panose="02020603050405020304" pitchFamily="18" charset="0"/>
               </a:rPr>
               <a:t>Profile thảo dược (Herb profile)</a:t>
             </a:r>
-            <a:endParaRPr lang="en-US" sz="2000">
+            <a:endParaRPr lang="en-US" sz="2400">
               <a:latin typeface="Times New Roman" panose="02020603050405020304" pitchFamily="18" charset="0"/>
               <a:cs typeface="Times New Roman" panose="02020603050405020304" pitchFamily="18" charset="0"/>
             </a:endParaRPr>
@@ -11109,7 +11100,7 @@
               <a:buChar char="Ø"/>
             </a:pPr>
             <a:r>
-              <a:rPr lang="en-US" sz="2000">
+              <a:rPr lang="en-US" sz="2400">
                 <a:latin typeface="Times New Roman" panose="02020603050405020304" pitchFamily="18" charset="0"/>
                 <a:cs typeface="Times New Roman" panose="02020603050405020304" pitchFamily="18" charset="0"/>
               </a:rPr>
@@ -11132,8 +11123,8 @@
         </p:nvSpPr>
         <p:spPr>
           <a:xfrm>
-            <a:off x="6282767" y="2032606"/>
-            <a:ext cx="4432858" cy="2708434"/>
+            <a:off x="6282766" y="2032606"/>
+            <a:ext cx="5518403" cy="3231654"/>
           </a:xfrm>
           <a:prstGeom prst="rect">
             <a:avLst/>
@@ -11154,7 +11145,7 @@
               <a:buChar char="q"/>
             </a:pPr>
             <a:r>
-              <a:rPr lang="en-US" sz="2000" b="1">
+              <a:rPr lang="en-US" sz="2400" b="1">
                 <a:latin typeface="Times New Roman" panose="02020603050405020304" pitchFamily="18" charset="0"/>
                 <a:cs typeface="Times New Roman" panose="02020603050405020304" pitchFamily="18" charset="0"/>
               </a:rPr>
@@ -11170,7 +11161,7 @@
               <a:buChar char="Ø"/>
             </a:pPr>
             <a:r>
-              <a:rPr lang="en-US" sz="2000">
+              <a:rPr lang="en-US" sz="2400">
                 <a:latin typeface="Times New Roman" panose="02020603050405020304" pitchFamily="18" charset="0"/>
                 <a:cs typeface="Times New Roman" panose="02020603050405020304" pitchFamily="18" charset="0"/>
               </a:rPr>
@@ -11186,26 +11177,26 @@
               <a:buChar char="Ø"/>
             </a:pPr>
             <a:r>
-              <a:rPr lang="vi-VN" sz="2000" i="1">
+              <a:rPr lang="vi-VN" sz="2400" i="1">
                 <a:latin typeface="Times New Roman" panose="02020603050405020304" pitchFamily="18" charset="0"/>
                 <a:cs typeface="Times New Roman" panose="02020603050405020304" pitchFamily="18" charset="0"/>
               </a:rPr>
               <a:t>Ý nghĩa kết quả:</a:t>
             </a:r>
             <a:r>
-              <a:rPr lang="vi-VN" sz="2000">
+              <a:rPr lang="vi-VN" sz="2400">
                 <a:latin typeface="Times New Roman" panose="02020603050405020304" pitchFamily="18" charset="0"/>
                 <a:cs typeface="Times New Roman" panose="02020603050405020304" pitchFamily="18" charset="0"/>
               </a:rPr>
               <a:t> Giá trị đầu ra xấp xỉ xác suất tồn tại quan hệ điều trị tiềm năng giữa thảo dược và bệnh.</a:t>
             </a:r>
-            <a:endParaRPr lang="en-US" sz="2000">
+            <a:endParaRPr lang="en-US" sz="2400">
               <a:latin typeface="Times New Roman" panose="02020603050405020304" pitchFamily="18" charset="0"/>
               <a:cs typeface="Times New Roman" panose="02020603050405020304" pitchFamily="18" charset="0"/>
             </a:endParaRPr>
           </a:p>
           <a:p>
-            <a:endParaRPr lang="en-US" sz="2000"/>
+            <a:endParaRPr lang="en-US" sz="2400"/>
           </a:p>
         </p:txBody>
       </p:sp>
@@ -11219,13 +11210,13 @@
   <p:clrMapOvr>
     <a:masterClrMapping/>
   </p:clrMapOvr>
-  <mc:AlternateContent xmlns:mc="http://schemas.openxmlformats.org/markup-compatibility/2006">
-    <mc:Choice xmlns:p159="http://schemas.microsoft.com/office/powerpoint/2015/09/main" Requires="p159">
+  <mc:AlternateContent xmlns:mc="http://schemas.openxmlformats.org/markup-compatibility/2006" xmlns:p159="http://schemas.microsoft.com/office/powerpoint/2015/09/main">
+    <mc:Choice Requires="p159">
       <p:transition spd="slow">
         <p159:morph option="byObject"/>
       </p:transition>
     </mc:Choice>
-    <mc:Fallback>
+    <mc:Fallback xmlns="">
       <p:transition spd="slow">
         <p:fade/>
       </p:transition>
@@ -11751,13 +11742,13 @@
   <p:clrMapOvr>
     <a:masterClrMapping/>
   </p:clrMapOvr>
-  <mc:AlternateContent xmlns:mc="http://schemas.openxmlformats.org/markup-compatibility/2006">
-    <mc:Choice xmlns:p159="http://schemas.microsoft.com/office/powerpoint/2015/09/main" Requires="p159">
+  <mc:AlternateContent xmlns:mc="http://schemas.openxmlformats.org/markup-compatibility/2006" xmlns:p159="http://schemas.microsoft.com/office/powerpoint/2015/09/main">
+    <mc:Choice Requires="p159">
       <p:transition spd="slow">
         <p159:morph option="byObject"/>
       </p:transition>
     </mc:Choice>
-    <mc:Fallback>
+    <mc:Fallback xmlns="">
       <p:transition spd="slow">
         <p:fade/>
       </p:transition>
@@ -13556,13 +13547,13 @@
   <p:clrMapOvr>
     <a:masterClrMapping/>
   </p:clrMapOvr>
-  <mc:AlternateContent xmlns:mc="http://schemas.openxmlformats.org/markup-compatibility/2006">
-    <mc:Choice xmlns:p159="http://schemas.microsoft.com/office/powerpoint/2015/09/main" Requires="p159">
+  <mc:AlternateContent xmlns:mc="http://schemas.openxmlformats.org/markup-compatibility/2006" xmlns:p159="http://schemas.microsoft.com/office/powerpoint/2015/09/main">
+    <mc:Choice Requires="p159">
       <p:transition spd="slow">
         <p159:morph option="byObject"/>
       </p:transition>
     </mc:Choice>
-    <mc:Fallback>
+    <mc:Fallback xmlns="">
       <p:transition spd="slow">
         <p:fade/>
       </p:transition>
@@ -14006,8 +13997,8 @@
           </a:p>
         </p:txBody>
       </p:sp>
-      <mc:AlternateContent xmlns:mc="http://schemas.openxmlformats.org/markup-compatibility/2006">
-        <mc:Choice xmlns:a14="http://schemas.microsoft.com/office/drawing/2010/main" Requires="a14">
+      <mc:AlternateContent xmlns:mc="http://schemas.openxmlformats.org/markup-compatibility/2006" xmlns:a14="http://schemas.microsoft.com/office/drawing/2010/main">
+        <mc:Choice Requires="a14">
           <p:graphicFrame>
             <p:nvGraphicFramePr>
               <p:cNvPr id="7" name="Table 6">
@@ -14106,6 +14097,7 @@
                                 <m:r>
                                   <a:rPr lang="en-US" sz="2500">
                                     <a:effectLst/>
+                                    <a:latin typeface="Cambria Math" panose="02040503050406030204" pitchFamily="18" charset="0"/>
                                   </a:rPr>
                                   <m:t>𝑘</m:t>
                                 </m:r>
@@ -14144,8 +14136,9 @@
                                 <m:sSub>
                                   <m:sSubPr>
                                     <m:ctrlPr>
-                                      <a:rPr lang="en-US" sz="2500">
+                                      <a:rPr lang="en-US" sz="2500" i="1">
                                         <a:effectLst/>
+                                        <a:latin typeface="Cambria Math" panose="02040503050406030204" pitchFamily="18" charset="0"/>
                                       </a:rPr>
                                     </m:ctrlPr>
                                   </m:sSubPr>
@@ -14153,6 +14146,7 @@
                                     <m:r>
                                       <a:rPr lang="en-US" sz="2500">
                                         <a:effectLst/>
+                                        <a:latin typeface="Cambria Math" panose="02040503050406030204" pitchFamily="18" charset="0"/>
                                       </a:rPr>
                                       <m:t>𝜆</m:t>
                                     </m:r>
@@ -14161,6 +14155,7 @@
                                     <m:r>
                                       <a:rPr lang="en-US" sz="2500">
                                         <a:effectLst/>
+                                        <a:latin typeface="Cambria Math" panose="02040503050406030204" pitchFamily="18" charset="0"/>
                                       </a:rPr>
                                       <m:t>𝑐</m:t>
                                     </m:r>
@@ -15934,7 +15929,7 @@
             </a:graphic>
           </p:graphicFrame>
         </mc:Choice>
-        <mc:Fallback>
+        <mc:Fallback xmlns="">
           <p:graphicFrame>
             <p:nvGraphicFramePr>
               <p:cNvPr id="7" name="Table 6">
@@ -17811,13 +17806,13 @@
   <p:clrMapOvr>
     <a:masterClrMapping/>
   </p:clrMapOvr>
-  <mc:AlternateContent xmlns:mc="http://schemas.openxmlformats.org/markup-compatibility/2006">
-    <mc:Choice xmlns:p159="http://schemas.microsoft.com/office/powerpoint/2015/09/main" Requires="p159">
+  <mc:AlternateContent xmlns:mc="http://schemas.openxmlformats.org/markup-compatibility/2006" xmlns:p159="http://schemas.microsoft.com/office/powerpoint/2015/09/main">
+    <mc:Choice Requires="p159">
       <p:transition spd="slow">
         <p159:morph option="byObject"/>
       </p:transition>
     </mc:Choice>
-    <mc:Fallback>
+    <mc:Fallback xmlns="">
       <p:transition spd="slow">
         <p:fade/>
       </p:transition>
@@ -18978,13 +18973,13 @@
   <p:clrMapOvr>
     <a:masterClrMapping/>
   </p:clrMapOvr>
-  <mc:AlternateContent xmlns:mc="http://schemas.openxmlformats.org/markup-compatibility/2006">
-    <mc:Choice xmlns:p159="http://schemas.microsoft.com/office/powerpoint/2015/09/main" Requires="p159">
+  <mc:AlternateContent xmlns:mc="http://schemas.openxmlformats.org/markup-compatibility/2006" xmlns:p159="http://schemas.microsoft.com/office/powerpoint/2015/09/main">
+    <mc:Choice Requires="p159">
       <p:transition spd="slow">
         <p159:morph option="byObject"/>
       </p:transition>
     </mc:Choice>
-    <mc:Fallback>
+    <mc:Fallback xmlns="">
       <p:transition spd="slow">
         <p:fade/>
       </p:transition>
@@ -20457,13 +20452,13 @@
   <p:clrMapOvr>
     <a:masterClrMapping/>
   </p:clrMapOvr>
-  <mc:AlternateContent xmlns:mc="http://schemas.openxmlformats.org/markup-compatibility/2006">
-    <mc:Choice xmlns:p159="http://schemas.microsoft.com/office/powerpoint/2015/09/main" Requires="p159">
+  <mc:AlternateContent xmlns:mc="http://schemas.openxmlformats.org/markup-compatibility/2006" xmlns:p159="http://schemas.microsoft.com/office/powerpoint/2015/09/main">
+    <mc:Choice Requires="p159">
       <p:transition spd="slow">
         <p159:morph option="byObject"/>
       </p:transition>
     </mc:Choice>
-    <mc:Fallback>
+    <mc:Fallback xmlns="">
       <p:transition spd="slow">
         <p:fade/>
       </p:transition>
@@ -20989,13 +20984,13 @@
   <p:clrMapOvr>
     <a:masterClrMapping/>
   </p:clrMapOvr>
-  <mc:AlternateContent xmlns:mc="http://schemas.openxmlformats.org/markup-compatibility/2006">
-    <mc:Choice xmlns:p159="http://schemas.microsoft.com/office/powerpoint/2015/09/main" Requires="p159">
+  <mc:AlternateContent xmlns:mc="http://schemas.openxmlformats.org/markup-compatibility/2006" xmlns:p159="http://schemas.microsoft.com/office/powerpoint/2015/09/main">
+    <mc:Choice Requires="p159">
       <p:transition spd="slow">
         <p159:morph option="byObject"/>
       </p:transition>
     </mc:Choice>
-    <mc:Fallback>
+    <mc:Fallback xmlns="">
       <p:transition spd="slow">
         <p:fade/>
       </p:transition>
@@ -21784,71 +21779,6 @@
       </p:sp>
       <p:sp>
         <p:nvSpPr>
-          <p:cNvPr id="4" name="Freeform 11">
-            <a:extLst>
-              <a:ext uri="{FF2B5EF4-FFF2-40B4-BE49-F238E27FC236}">
-                <a16:creationId xmlns:a16="http://schemas.microsoft.com/office/drawing/2014/main" id="{8C1DA084-2FE0-F48D-8AA7-199EE176BAF8}"/>
-              </a:ext>
-            </a:extLst>
-          </p:cNvPr>
-          <p:cNvSpPr/>
-          <p:nvPr/>
-        </p:nvSpPr>
-        <p:spPr>
-          <a:xfrm>
-            <a:off x="-1622" y="5321393"/>
-            <a:ext cx="1437368" cy="1536607"/>
-          </a:xfrm>
-          <a:custGeom>
-            <a:avLst/>
-            <a:gdLst/>
-            <a:ahLst/>
-            <a:cxnLst/>
-            <a:rect l="l" t="t" r="r" b="b"/>
-            <a:pathLst>
-              <a:path w="3849053" h="4114800">
-                <a:moveTo>
-                  <a:pt x="0" y="0"/>
-                </a:moveTo>
-                <a:lnTo>
-                  <a:pt x="3849052" y="0"/>
-                </a:lnTo>
-                <a:lnTo>
-                  <a:pt x="3849052" y="4114800"/>
-                </a:lnTo>
-                <a:lnTo>
-                  <a:pt x="0" y="4114800"/>
-                </a:lnTo>
-                <a:lnTo>
-                  <a:pt x="0" y="0"/>
-                </a:lnTo>
-                <a:close/>
-              </a:path>
-            </a:pathLst>
-          </a:custGeom>
-          <a:blipFill>
-            <a:blip>
-              <a:extLst>
-                <a:ext uri="{96DAC541-7B7A-43D3-8B79-37D633B846F1}">
-                  <asvg:svgBlip xmlns:asvg="http://schemas.microsoft.com/office/drawing/2016/SVG/main" r:embed="rId5"/>
-                </a:ext>
-              </a:extLst>
-            </a:blip>
-            <a:stretch>
-              <a:fillRect/>
-            </a:stretch>
-          </a:blipFill>
-        </p:spPr>
-        <p:txBody>
-          <a:bodyPr/>
-          <a:lstStyle/>
-          <a:p>
-            <a:endParaRPr lang="en-US"/>
-          </a:p>
-        </p:txBody>
-      </p:sp>
-      <p:sp>
-        <p:nvSpPr>
           <p:cNvPr id="9" name="TextBox 8">
             <a:extLst>
               <a:ext uri="{FF2B5EF4-FFF2-40B4-BE49-F238E27FC236}">
@@ -21861,8 +21791,8 @@
         </p:nvSpPr>
         <p:spPr>
           <a:xfrm>
-            <a:off x="390830" y="1849872"/>
-            <a:ext cx="6096000" cy="3693319"/>
+            <a:off x="350126" y="1212606"/>
+            <a:ext cx="5957419" cy="5509200"/>
           </a:xfrm>
           <a:prstGeom prst="rect">
             <a:avLst/>
@@ -21876,7 +21806,7 @@
           <a:lstStyle/>
           <a:p>
             <a:r>
-              <a:rPr lang="en-US" sz="1800" b="1" kern="1200">
+              <a:rPr lang="en-US" sz="2200" b="1" kern="1200">
                 <a:solidFill>
                   <a:schemeClr val="tx1"/>
                 </a:solidFill>
@@ -21893,7 +21823,7 @@
               <a:buChar char="•"/>
             </a:pPr>
             <a:r>
-              <a:rPr lang="vi-VN" sz="1800" kern="1200">
+              <a:rPr lang="vi-VN" sz="2200" kern="1200">
                 <a:solidFill>
                   <a:schemeClr val="tx1"/>
                 </a:solidFill>
@@ -21910,7 +21840,7 @@
               <a:buChar char="•"/>
             </a:pPr>
             <a:r>
-              <a:rPr lang="vi-VN" sz="1800" kern="1200">
+              <a:rPr lang="vi-VN" sz="2200" kern="1200">
                 <a:solidFill>
                   <a:schemeClr val="tx1"/>
                 </a:solidFill>
@@ -21927,7 +21857,7 @@
               <a:buChar char="ü"/>
             </a:pPr>
             <a:r>
-              <a:rPr lang="vi-VN" kern="1200">
+              <a:rPr lang="vi-VN" sz="2200" kern="1200">
                 <a:solidFill>
                   <a:schemeClr val="tx1"/>
                 </a:solidFill>
@@ -21944,7 +21874,7 @@
               <a:buChar char="ü"/>
             </a:pPr>
             <a:r>
-              <a:rPr lang="vi-VN" kern="1200">
+              <a:rPr lang="vi-VN" sz="2200" kern="1200">
                 <a:solidFill>
                   <a:schemeClr val="tx1"/>
                 </a:solidFill>
@@ -21961,7 +21891,7 @@
               <a:buChar char="•"/>
             </a:pPr>
             <a:r>
-              <a:rPr lang="vi-VN" sz="1800" kern="1200">
+              <a:rPr lang="vi-VN" sz="2200" kern="1200">
                 <a:solidFill>
                   <a:schemeClr val="tx1"/>
                 </a:solidFill>
@@ -21972,7 +21902,7 @@
               <a:t>Đóng góp lớn từ Học đối chiếu: Thực nghiệm </a:t>
             </a:r>
             <a:r>
-              <a:rPr lang="vi-VN" sz="1800" i="1" kern="1200">
+              <a:rPr lang="vi-VN" sz="2200" i="1" kern="1200">
                 <a:solidFill>
                   <a:schemeClr val="tx1"/>
                 </a:solidFill>
@@ -21983,7 +21913,7 @@
               <a:t>Ablation study</a:t>
             </a:r>
             <a:r>
-              <a:rPr lang="vi-VN" sz="1800" kern="1200">
+              <a:rPr lang="vi-VN" sz="2200" kern="1200">
                 <a:solidFill>
                   <a:schemeClr val="tx1"/>
                 </a:solidFill>
@@ -21993,7 +21923,7 @@
               </a:rPr>
               <a:t> xác nhận tính bổ trợ của các thành phần</a:t>
             </a:r>
-            <a:endParaRPr lang="en-US" sz="1800" kern="1200">
+            <a:endParaRPr lang="en-US" sz="2200" kern="1200">
               <a:solidFill>
                 <a:schemeClr val="tx1"/>
               </a:solidFill>
@@ -22018,8 +21948,8 @@
         </p:nvSpPr>
         <p:spPr>
           <a:xfrm>
-            <a:off x="6659292" y="1849872"/>
-            <a:ext cx="5141878" cy="2031325"/>
+            <a:off x="6699996" y="1212606"/>
+            <a:ext cx="5141878" cy="3139321"/>
           </a:xfrm>
           <a:prstGeom prst="rect">
             <a:avLst/>
@@ -22033,7 +21963,7 @@
           <a:lstStyle/>
           <a:p>
             <a:r>
-              <a:rPr lang="vi-VN" sz="1800" b="1" kern="1200">
+              <a:rPr lang="vi-VN" sz="2200" b="1" kern="1200">
                 <a:solidFill>
                   <a:schemeClr val="tx1"/>
                 </a:solidFill>
@@ -22043,7 +21973,7 @@
               </a:rPr>
               <a:t>Hướng phát triển</a:t>
             </a:r>
-            <a:endParaRPr lang="en-US" sz="1800" b="1" kern="1200">
+            <a:endParaRPr lang="en-US" sz="2200" b="1" kern="1200">
               <a:solidFill>
                 <a:schemeClr val="tx1"/>
               </a:solidFill>
@@ -22053,8 +21983,12 @@
             </a:endParaRPr>
           </a:p>
           <a:p>
-            <a:r>
-              <a:rPr lang="vi-VN" sz="1800" kern="1200">
+            <a:pPr marL="342900" indent="-342900">
+              <a:buFont typeface="Arial" panose="020B0604020202020204" pitchFamily="34" charset="0"/>
+              <a:buChar char="•"/>
+            </a:pPr>
+            <a:r>
+              <a:rPr lang="vi-VN" sz="2200" kern="1200">
                 <a:solidFill>
                   <a:schemeClr val="tx1"/>
                 </a:solidFill>
@@ -22065,7 +21999,7 @@
               <a:t>Mở rộng kiểm chứng: Đánh giá tính tổng quát của mô hình bằng cách thử nghiệm trên các bộ dữ liệu khác</a:t>
             </a:r>
             <a:r>
-              <a:rPr lang="en-US" sz="1800" kern="1200">
+              <a:rPr lang="en-US" sz="2200" kern="1200">
                 <a:solidFill>
                   <a:schemeClr val="tx1"/>
                 </a:solidFill>
@@ -22077,8 +22011,12 @@
             </a:r>
           </a:p>
           <a:p>
-            <a:r>
-              <a:rPr lang="vi-VN" sz="1800" kern="1200">
+            <a:pPr marL="342900" indent="-342900">
+              <a:buFont typeface="Arial" panose="020B0604020202020204" pitchFamily="34" charset="0"/>
+              <a:buChar char="•"/>
+            </a:pPr>
+            <a:r>
+              <a:rPr lang="vi-VN" sz="2200" kern="1200">
                 <a:solidFill>
                   <a:schemeClr val="tx1"/>
                 </a:solidFill>
@@ -22086,16 +22024,19 @@
                 <a:latin typeface="Times New Roman" panose="02020603050405020304" pitchFamily="18" charset="0"/>
                 <a:cs typeface="Times New Roman" panose="02020603050405020304" pitchFamily="18" charset="0"/>
               </a:rPr>
-              <a:t>Tích hợp thêm dữ liệu sinh học: Bổ sung thông tin cấu trúc phân tử chuyên sâu của hợp chất vào quá trình xây dựng đồ thị </a:t>
-            </a:r>
-            <a:endParaRPr lang="en-US" sz="1800" kern="1200">
-              <a:solidFill>
-                <a:schemeClr val="tx1"/>
-              </a:solidFill>
-              <a:effectLst/>
-              <a:latin typeface="Times New Roman" panose="02020603050405020304" pitchFamily="18" charset="0"/>
-              <a:cs typeface="Times New Roman" panose="02020603050405020304" pitchFamily="18" charset="0"/>
-            </a:endParaRPr>
+              <a:t>Tích hợp thêm dữ liệu sinh học: Bổ sung thông tin cấu trúc phân tử chuyên sâu của hợp chất vào quá trình xây dựng đồ thị</a:t>
+            </a:r>
+            <a:r>
+              <a:rPr lang="en-US" sz="2200" kern="1200">
+                <a:solidFill>
+                  <a:schemeClr val="tx1"/>
+                </a:solidFill>
+                <a:effectLst/>
+                <a:latin typeface="Times New Roman" panose="02020603050405020304" pitchFamily="18" charset="0"/>
+                <a:cs typeface="Times New Roman" panose="02020603050405020304" pitchFamily="18" charset="0"/>
+              </a:rPr>
+              <a:t>.</a:t>
+            </a:r>
           </a:p>
           <a:p>
             <a:pPr marL="0" marR="0" lvl="0" indent="0" algn="l" defTabSz="914400" rtl="0" eaLnBrk="1" fontAlgn="auto" latinLnBrk="0" hangingPunct="1">
@@ -22115,7 +22056,7 @@
               <a:tabLst/>
               <a:defRPr/>
             </a:pPr>
-            <a:endParaRPr lang="en-US" sz="1800" kern="1200">
+            <a:endParaRPr lang="en-US" sz="2200" kern="1200">
               <a:solidFill>
                 <a:schemeClr val="tx1"/>
               </a:solidFill>
@@ -22136,13 +22077,13 @@
   <p:clrMapOvr>
     <a:masterClrMapping/>
   </p:clrMapOvr>
-  <mc:AlternateContent xmlns:mc="http://schemas.openxmlformats.org/markup-compatibility/2006">
-    <mc:Choice xmlns:p159="http://schemas.microsoft.com/office/powerpoint/2015/09/main" Requires="p159">
+  <mc:AlternateContent xmlns:mc="http://schemas.openxmlformats.org/markup-compatibility/2006" xmlns:p159="http://schemas.microsoft.com/office/powerpoint/2015/09/main">
+    <mc:Choice Requires="p159">
       <p:transition spd="slow">
         <p159:morph option="byObject"/>
       </p:transition>
     </mc:Choice>
-    <mc:Fallback>
+    <mc:Fallback xmlns="">
       <p:transition spd="slow">
         <p:fade/>
       </p:transition>
@@ -22526,7 +22467,7 @@
         <p:spPr>
           <a:xfrm>
             <a:off x="650445" y="2049797"/>
-            <a:ext cx="10889488" cy="2888163"/>
+            <a:ext cx="10889488" cy="2305311"/>
           </a:xfrm>
           <a:prstGeom prst="rect">
             <a:avLst/>
@@ -22544,11 +22485,11 @@
               </a:lnSpc>
             </a:pPr>
             <a:r>
-              <a:rPr lang="en-US" sz="6600">
+              <a:rPr lang="en-US" sz="5400">
                 <a:solidFill>
                   <a:srgbClr val="0C3877"/>
                 </a:solidFill>
-                <a:latin typeface="Anton"/>
+                <a:latin typeface="UTM Androgyne" panose="02040603050506020204" pitchFamily="18" charset="0"/>
                 <a:ea typeface="Anton"/>
                 <a:cs typeface="Anton"/>
                 <a:sym typeface="Anton"/>
@@ -22563,16 +22504,16 @@
               </a:lnSpc>
             </a:pPr>
             <a:r>
-              <a:rPr lang="en-US" sz="6600">
+              <a:rPr lang="en-US" sz="5400">
                 <a:solidFill>
                   <a:srgbClr val="0C3877"/>
                 </a:solidFill>
-                <a:latin typeface="Anton"/>
+                <a:latin typeface="UTM Androgyne" panose="02040603050506020204" pitchFamily="18" charset="0"/>
                 <a:ea typeface="Anton"/>
                 <a:cs typeface="Anton"/>
                 <a:sym typeface="Anton"/>
               </a:rPr>
-              <a:t>VÀ CÁC BẠN ĐÃ LẮNG NGHE</a:t>
+              <a:t>VÀ ANH CHỊ ĐÃ LẮNG NGHE</a:t>
             </a:r>
           </a:p>
         </p:txBody>
@@ -22815,13 +22756,13 @@
   <p:clrMapOvr>
     <a:masterClrMapping/>
   </p:clrMapOvr>
-  <mc:AlternateContent xmlns:mc="http://schemas.openxmlformats.org/markup-compatibility/2006">
-    <mc:Choice xmlns:p159="http://schemas.microsoft.com/office/powerpoint/2015/09/main" Requires="p159">
+  <mc:AlternateContent xmlns:mc="http://schemas.openxmlformats.org/markup-compatibility/2006" xmlns:p159="http://schemas.microsoft.com/office/powerpoint/2015/09/main">
+    <mc:Choice Requires="p159">
       <p:transition spd="slow">
         <p159:morph option="byObject"/>
       </p:transition>
     </mc:Choice>
-    <mc:Fallback>
+    <mc:Fallback xmlns="">
       <p:transition spd="slow">
         <p:fade/>
       </p:transition>
@@ -24082,13 +24023,13 @@
   <p:clrMapOvr>
     <a:masterClrMapping/>
   </p:clrMapOvr>
-  <mc:AlternateContent xmlns:mc="http://schemas.openxmlformats.org/markup-compatibility/2006">
-    <mc:Choice xmlns:p159="http://schemas.microsoft.com/office/powerpoint/2015/09/main" Requires="p159">
+  <mc:AlternateContent xmlns:mc="http://schemas.openxmlformats.org/markup-compatibility/2006" xmlns:p159="http://schemas.microsoft.com/office/powerpoint/2015/09/main">
+    <mc:Choice Requires="p159">
       <p:transition spd="slow">
         <p159:morph option="byObject"/>
       </p:transition>
     </mc:Choice>
-    <mc:Fallback>
+    <mc:Fallback xmlns="">
       <p:transition spd="slow">
         <p:fade/>
       </p:transition>
@@ -25853,8 +25794,8 @@
         </p:nvSpPr>
         <p:spPr>
           <a:xfrm>
-            <a:off x="8193063" y="2823023"/>
-            <a:ext cx="3346418" cy="3046988"/>
+            <a:off x="8138668" y="2348108"/>
+            <a:ext cx="3346418" cy="3416320"/>
           </a:xfrm>
           <a:prstGeom prst="rect">
             <a:avLst/>
@@ -25876,7 +25817,7 @@
                 <a:latin typeface="Times New Roman" panose="02020603050405020304" pitchFamily="18" charset="0"/>
                 <a:cs typeface="Times New Roman" panose="02020603050405020304" pitchFamily="18" charset="0"/>
               </a:rPr>
-              <a:t>Cần phát triển các phương pháp tính toán dựa trên dữ liệu, đặc biệt là các mô hình học sâu để thu hẹp không gian tìm kiếm và định hướng cho các thí nghiệm sinh học.</a:t>
+              <a:t>Thông qua đó, đề tài không chỉ hướng tới việc cải thiện độ chính xác dự đoán mà còn góp phần làm rõ vai trò của các kỹ thuật học sâu hiện đại trong khai thác dữ liệu sinh học phức tạp.</a:t>
             </a:r>
           </a:p>
         </p:txBody>
@@ -25891,13 +25832,13 @@
   <p:clrMapOvr>
     <a:masterClrMapping/>
   </p:clrMapOvr>
-  <mc:AlternateContent xmlns:mc="http://schemas.openxmlformats.org/markup-compatibility/2006">
-    <mc:Choice xmlns:p159="http://schemas.microsoft.com/office/powerpoint/2015/09/main" Requires="p159">
+  <mc:AlternateContent xmlns:mc="http://schemas.openxmlformats.org/markup-compatibility/2006" xmlns:p159="http://schemas.microsoft.com/office/powerpoint/2015/09/main">
+    <mc:Choice Requires="p159">
       <p:transition spd="slow">
         <p159:morph option="byObject"/>
       </p:transition>
     </mc:Choice>
-    <mc:Fallback>
+    <mc:Fallback xmlns="">
       <p:transition spd="slow">
         <p:fade/>
       </p:transition>
@@ -26996,13 +26937,13 @@
   <p:clrMapOvr>
     <a:masterClrMapping/>
   </p:clrMapOvr>
-  <mc:AlternateContent xmlns:mc="http://schemas.openxmlformats.org/markup-compatibility/2006">
-    <mc:Choice xmlns:p159="http://schemas.microsoft.com/office/powerpoint/2015/09/main" Requires="p159">
+  <mc:AlternateContent xmlns:mc="http://schemas.openxmlformats.org/markup-compatibility/2006" xmlns:p159="http://schemas.microsoft.com/office/powerpoint/2015/09/main">
+    <mc:Choice Requires="p159">
       <p:transition spd="slow">
         <p159:morph option="byObject"/>
       </p:transition>
     </mc:Choice>
-    <mc:Fallback>
+    <mc:Fallback xmlns="">
       <p:transition spd="slow">
         <p:fade/>
       </p:transition>
@@ -28259,13 +28200,13 @@
   <p:clrMapOvr>
     <a:masterClrMapping/>
   </p:clrMapOvr>
-  <mc:AlternateContent xmlns:mc="http://schemas.openxmlformats.org/markup-compatibility/2006">
-    <mc:Choice xmlns:p159="http://schemas.microsoft.com/office/powerpoint/2015/09/main" Requires="p159">
+  <mc:AlternateContent xmlns:mc="http://schemas.openxmlformats.org/markup-compatibility/2006" xmlns:p159="http://schemas.microsoft.com/office/powerpoint/2015/09/main">
+    <mc:Choice Requires="p159">
       <p:transition spd="slow">
         <p159:morph option="byObject"/>
       </p:transition>
     </mc:Choice>
-    <mc:Fallback>
+    <mc:Fallback xmlns="">
       <p:transition spd="slow">
         <p:fade/>
       </p:transition>
@@ -29921,13 +29862,13 @@
   <p:clrMapOvr>
     <a:masterClrMapping/>
   </p:clrMapOvr>
-  <mc:AlternateContent xmlns:mc="http://schemas.openxmlformats.org/markup-compatibility/2006">
-    <mc:Choice xmlns:p159="http://schemas.microsoft.com/office/powerpoint/2015/09/main" Requires="p159">
+  <mc:AlternateContent xmlns:mc="http://schemas.openxmlformats.org/markup-compatibility/2006" xmlns:p159="http://schemas.microsoft.com/office/powerpoint/2015/09/main">
+    <mc:Choice Requires="p159">
       <p:transition spd="slow">
         <p159:morph option="byObject"/>
       </p:transition>
     </mc:Choice>
-    <mc:Fallback>
+    <mc:Fallback xmlns="">
       <p:transition spd="slow">
         <p:fade/>
       </p:transition>
